--- a/AureonCare_Executive_Presentation.pptx
+++ b/AureonCare_Executive_Presentation.pptx
@@ -3251,8 +3251,8 @@
         </p:nvSpPr>
         <p:spPr>
           <a:xfrm>
-            <a:off x="2743200" y="4114800"/>
-            <a:ext cx="3657600" cy="457200"/>
+            <a:off x="2286000" y="4114800"/>
+            <a:ext cx="4572000" cy="457200"/>
           </a:xfrm>
           <a:prstGeom prst="rect">
             <a:avLst/>
@@ -3273,7 +3273,7 @@
               </a:defRPr>
             </a:pPr>
             <a:r>
-              <a:t>Pre-Launch - Q2 2026</a:t>
+              <a:t>Pre-Beta Development</a:t>
             </a:r>
           </a:p>
         </p:txBody>
@@ -4354,7 +4354,7 @@
               </a:defRPr>
             </a:pPr>
             <a:r>
-              <a:t>Launch: April 2026 | Limited Early Adopter Slots Available</a:t>
+              <a:t>Beta: Q1 2026 | Launch: Q2 2026 | Beta &amp; Early Adopter Slots Available</a:t>
             </a:r>
           </a:p>
         </p:txBody>
@@ -4918,7 +4918,7 @@
               </a:defRPr>
             </a:pPr>
             <a:r>
-              <a:t>Q2 2026</a:t>
+              <a:t>Q1→Q2</a:t>
             </a:r>
           </a:p>
         </p:txBody>
@@ -4953,7 +4953,7 @@
               </a:defRPr>
             </a:pPr>
             <a:r>
-              <a:t>Launch Date</a:t>
+              <a:t>Beta→Launch</a:t>
             </a:r>
           </a:p>
         </p:txBody>
@@ -7047,7 +7047,7 @@
               </a:defRPr>
             </a:pPr>
             <a:r>
-              <a:t>📊 Beta Program Validation</a:t>
+              <a:t>🔬 Development Status &amp; Readiness</a:t>
             </a:r>
           </a:p>
         </p:txBody>
@@ -7127,7 +7127,7 @@
               </a:defRPr>
             </a:pPr>
             <a:r>
-              <a:t>88%</a:t>
+              <a:t>95%</a:t>
             </a:r>
           </a:p>
         </p:txBody>
@@ -7162,7 +7162,7 @@
               </a:defRPr>
             </a:pPr>
             <a:r>
-              <a:t>Module Adoption</a:t>
+              <a:t>Code Complete</a:t>
             </a:r>
           </a:p>
         </p:txBody>
@@ -7242,7 +7242,7 @@
               </a:defRPr>
             </a:pPr>
             <a:r>
-              <a:t>4.4★</a:t>
+              <a:t>100%</a:t>
             </a:r>
           </a:p>
         </p:txBody>
@@ -7277,7 +7277,7 @@
               </a:defRPr>
             </a:pPr>
             <a:r>
-              <a:t>User Satisfaction</a:t>
+              <a:t>Documentation</a:t>
             </a:r>
           </a:p>
         </p:txBody>
@@ -7357,7 +7357,7 @@
               </a:defRPr>
             </a:pPr>
             <a:r>
-              <a:t>25-35</a:t>
+              <a:t>14</a:t>
             </a:r>
           </a:p>
         </p:txBody>
@@ -7392,7 +7392,7 @@
               </a:defRPr>
             </a:pPr>
             <a:r>
-              <a:t>Days to Implement</a:t>
+              <a:t>Modules Ready</a:t>
             </a:r>
           </a:p>
         </p:txBody>
@@ -7472,7 +7472,7 @@
               </a:defRPr>
             </a:pPr>
             <a:r>
-              <a:t>85%</a:t>
+              <a:t>Q1 2026</a:t>
             </a:r>
           </a:p>
         </p:txBody>
@@ -7507,7 +7507,7 @@
               </a:defRPr>
             </a:pPr>
             <a:r>
-              <a:t>Search Adoption</a:t>
+              <a:t>Beta Launch</a:t>
             </a:r>
           </a:p>
         </p:txBody>
@@ -7587,7 +7587,7 @@
               </a:defRPr>
             </a:pPr>
             <a:r>
-              <a:t>45%</a:t>
+              <a:t>10-15</a:t>
             </a:r>
           </a:p>
         </p:txBody>
@@ -7622,7 +7622,7 @@
               </a:defRPr>
             </a:pPr>
             <a:r>
-              <a:t>Ticket Reduction</a:t>
+              <a:t>Beta Practices</a:t>
             </a:r>
           </a:p>
         </p:txBody>
@@ -7702,7 +7702,7 @@
               </a:defRPr>
             </a:pPr>
             <a:r>
-              <a:t>38%</a:t>
+              <a:t>Q2 2026</a:t>
             </a:r>
           </a:p>
         </p:txBody>
@@ -7737,7 +7737,7 @@
               </a:defRPr>
             </a:pPr>
             <a:r>
-              <a:t>Faster Claims</a:t>
+              <a:t>General Launch</a:t>
             </a:r>
           </a:p>
         </p:txBody>
@@ -9313,7 +9313,7 @@
               </a:defRPr>
             </a:pPr>
             <a:r>
-              <a:t>🗺️ Launch &amp; Growth Roadmap</a:t>
+              <a:t>🗺️ Development &amp; Launch Roadmap</a:t>
             </a:r>
           </a:p>
         </p:txBody>
@@ -9352,7 +9352,7 @@
               </a:defRPr>
             </a:pPr>
             <a:r>
-              <a:t>Q2 2026 (April-June) - Launch:</a:t>
+              <a:t>Q1 2026 (Jan-Mar) - Beta Phase:</a:t>
             </a:r>
           </a:p>
           <a:p>
@@ -9367,7 +9367,7 @@
               </a:defRPr>
             </a:pPr>
             <a:r>
-              <a:t>🚀 Product launch (April 1, 2026)</a:t>
+              <a:t>🔬 Complete final development &amp; testing</a:t>
             </a:r>
           </a:p>
           <a:p>
@@ -9382,7 +9382,7 @@
               </a:defRPr>
             </a:pPr>
             <a:r>
-              <a:t>🎯 Onboard first 50 practices</a:t>
+              <a:t>🎯 Launch closed beta (10-15 practices)</a:t>
             </a:r>
           </a:p>
           <a:p>
@@ -9397,7 +9397,7 @@
               </a:defRPr>
             </a:pPr>
             <a:r>
-              <a:t>📱 Mobile companion app release</a:t>
+              <a:t>🐛 Bug fixes &amp; optimization</a:t>
             </a:r>
           </a:p>
           <a:p>
@@ -9412,7 +9412,7 @@
               </a:defRPr>
             </a:pPr>
             <a:r>
-              <a:t>🔗 Integration marketplace</a:t>
+              <a:t>✅ Complete security audits</a:t>
             </a:r>
           </a:p>
           <a:p>
@@ -9439,7 +9439,7 @@
               </a:defRPr>
             </a:pPr>
             <a:r>
-              <a:t>Q3 2026 (July-September) - Growth:</a:t>
+              <a:t>Q2 2026 (Apr-Jun) - General Launch:</a:t>
             </a:r>
           </a:p>
           <a:p>
@@ -9454,7 +9454,7 @@
               </a:defRPr>
             </a:pPr>
             <a:r>
-              <a:t>🎯 Reach 100 active practices</a:t>
+              <a:t>🚀 Official product launch (April 2026)</a:t>
             </a:r>
           </a:p>
           <a:p>
@@ -9469,7 +9469,7 @@
               </a:defRPr>
             </a:pPr>
             <a:r>
-              <a:t>🤖 AI Clinical Assistant launch</a:t>
+              <a:t>🎯 Onboard first 50 paying practices</a:t>
             </a:r>
           </a:p>
           <a:p>
@@ -9484,7 +9484,7 @@
               </a:defRPr>
             </a:pPr>
             <a:r>
-              <a:t>🏥 Specialty templates (5 specialties)</a:t>
+              <a:t>📱 Mobile app (beta) release</a:t>
             </a:r>
           </a:p>
           <a:p>
@@ -9498,6 +9498,9 @@
                 </a:solidFill>
               </a:defRPr>
             </a:pPr>
+            <a:r>
+              <a:t>🔗 Integration marketplace launch</a:t>
+            </a:r>
           </a:p>
           <a:p>
             <a:pPr>
@@ -9510,9 +9513,6 @@
                 </a:solidFill>
               </a:defRPr>
             </a:pPr>
-            <a:r>
-              <a:t>Q4 2026 (October-December) - Scale:</a:t>
-            </a:r>
           </a:p>
           <a:p>
             <a:pPr>
@@ -9526,7 +9526,7 @@
               </a:defRPr>
             </a:pPr>
             <a:r>
-              <a:t>🎯 Target 150 practices by year-end</a:t>
+              <a:t>Q3-Q4 2026 - Growth &amp; Scale:</a:t>
             </a:r>
           </a:p>
           <a:p>
@@ -9541,7 +9541,7 @@
               </a:defRPr>
             </a:pPr>
             <a:r>
-              <a:t>💳 Patient financial automation</a:t>
+              <a:t>🎯 Reach 150 practices by year-end</a:t>
             </a:r>
           </a:p>
           <a:p>
@@ -9556,7 +9556,22 @@
               </a:defRPr>
             </a:pPr>
             <a:r>
-              <a:t>🎯 Value-based care reporting</a:t>
+              <a:t>🤖 AI Clinical Assistant launch</a:t>
+            </a:r>
+          </a:p>
+          <a:p>
+            <a:pPr>
+              <a:spcBef>
+                <a:spcPts val="600"/>
+              </a:spcBef>
+              <a:defRPr sz="1800">
+                <a:solidFill>
+                  <a:srgbClr val="1E293B"/>
+                </a:solidFill>
+              </a:defRPr>
+            </a:pPr>
+            <a:r>
+              <a:t>💳 Advanced features rollout</a:t>
             </a:r>
           </a:p>
         </p:txBody>
